--- a/latex/lec4/report_2412747_4.pptx
+++ b/latex/lec4/report_2412747_4.pptx
@@ -108,6 +108,11 @@
       </a:defRPr>
     </a:lvl9pPr>
   </p:defaultTextStyle>
+  <p:extLst>
+    <p:ext uri="{EFAFB233-063F-42B5-8137-9DF3F51BA10A}">
+      <p15:sldGuideLst xmlns:p15="http://schemas.microsoft.com/office/powerpoint/2012/main"/>
+    </p:ext>
+  </p:extLst>
 </p:presentation>
 </file>
 
@@ -3613,6 +3618,87 @@
           <a:chExt cx="0" cy="0"/>
         </a:xfrm>
       </p:grpSpPr>
+      <p:pic>
+        <p:nvPicPr>
+          <p:cNvPr id="3" name="図 2">
+            <a:extLst>
+              <a:ext uri="{FF2B5EF4-FFF2-40B4-BE49-F238E27FC236}">
+                <a16:creationId xmlns:a16="http://schemas.microsoft.com/office/drawing/2014/main" id="{5098D9E7-6551-6005-F3DC-B2B86FD8FD9F}"/>
+              </a:ext>
+            </a:extLst>
+          </p:cNvPr>
+          <p:cNvPicPr>
+            <a:picLocks noChangeAspect="1"/>
+          </p:cNvPicPr>
+          <p:nvPr/>
+        </p:nvPicPr>
+        <p:blipFill>
+          <a:blip r:embed="rId2"/>
+          <a:stretch>
+            <a:fillRect/>
+          </a:stretch>
+        </p:blipFill>
+        <p:spPr>
+          <a:xfrm>
+            <a:off x="3822700" y="2178050"/>
+            <a:ext cx="4546600" cy="2501900"/>
+          </a:xfrm>
+          <a:prstGeom prst="rect">
+            <a:avLst/>
+          </a:prstGeom>
+        </p:spPr>
+      </p:pic>
+      <p:sp>
+        <p:nvSpPr>
+          <p:cNvPr id="4" name="テキスト ボックス 3">
+            <a:extLst>
+              <a:ext uri="{FF2B5EF4-FFF2-40B4-BE49-F238E27FC236}">
+                <a16:creationId xmlns:a16="http://schemas.microsoft.com/office/drawing/2014/main" id="{F499F48E-CB77-9913-38A6-BDC986B39753}"/>
+              </a:ext>
+            </a:extLst>
+          </p:cNvPr>
+          <p:cNvSpPr txBox="1"/>
+          <p:nvPr/>
+        </p:nvSpPr>
+        <p:spPr>
+          <a:xfrm>
+            <a:off x="4836681" y="4679950"/>
+            <a:ext cx="2518638" cy="369332"/>
+          </a:xfrm>
+          <a:prstGeom prst="rect">
+            <a:avLst/>
+          </a:prstGeom>
+          <a:noFill/>
+        </p:spPr>
+        <p:txBody>
+          <a:bodyPr wrap="none" rtlCol="0">
+            <a:spAutoFit/>
+          </a:bodyPr>
+          <a:lstStyle/>
+          <a:p>
+            <a:r>
+              <a:rPr kumimoji="1" lang="ja-JP" altLang="en-US"/>
+              <a:t>図</a:t>
+            </a:r>
+            <a:r>
+              <a:rPr kumimoji="1" lang="en-US" altLang="ja-JP" dirty="0"/>
+              <a:t>1</a:t>
+            </a:r>
+            <a:r>
+              <a:rPr kumimoji="1" lang="ja-JP" altLang="en-US"/>
+              <a:t>　</a:t>
+            </a:r>
+            <a:r>
+              <a:rPr kumimoji="1" lang="en-US" altLang="ja-JP" dirty="0"/>
+              <a:t>1</a:t>
+            </a:r>
+            <a:r>
+              <a:rPr kumimoji="1" lang="ja-JP" altLang="en-US"/>
+              <a:t>問目の実行結果</a:t>
+            </a:r>
+          </a:p>
+        </p:txBody>
+      </p:sp>
     </p:spTree>
     <p:extLst>
       <p:ext uri="{BB962C8B-B14F-4D97-AF65-F5344CB8AC3E}">
@@ -3643,6 +3729,87 @@
           <a:chExt cx="0" cy="0"/>
         </a:xfrm>
       </p:grpSpPr>
+      <p:pic>
+        <p:nvPicPr>
+          <p:cNvPr id="3" name="図 2">
+            <a:extLst>
+              <a:ext uri="{FF2B5EF4-FFF2-40B4-BE49-F238E27FC236}">
+                <a16:creationId xmlns:a16="http://schemas.microsoft.com/office/drawing/2014/main" id="{F5451F93-6628-2BA8-FF31-5465E4D7195B}"/>
+              </a:ext>
+            </a:extLst>
+          </p:cNvPr>
+          <p:cNvPicPr>
+            <a:picLocks noChangeAspect="1"/>
+          </p:cNvPicPr>
+          <p:nvPr/>
+        </p:nvPicPr>
+        <p:blipFill>
+          <a:blip r:embed="rId2"/>
+          <a:stretch>
+            <a:fillRect/>
+          </a:stretch>
+        </p:blipFill>
+        <p:spPr>
+          <a:xfrm>
+            <a:off x="3816350" y="2794000"/>
+            <a:ext cx="4559300" cy="1270000"/>
+          </a:xfrm>
+          <a:prstGeom prst="rect">
+            <a:avLst/>
+          </a:prstGeom>
+        </p:spPr>
+      </p:pic>
+      <p:sp>
+        <p:nvSpPr>
+          <p:cNvPr id="4" name="テキスト ボックス 3">
+            <a:extLst>
+              <a:ext uri="{FF2B5EF4-FFF2-40B4-BE49-F238E27FC236}">
+                <a16:creationId xmlns:a16="http://schemas.microsoft.com/office/drawing/2014/main" id="{C9C25CE7-BC52-FF6F-4B15-103E9BF43D95}"/>
+              </a:ext>
+            </a:extLst>
+          </p:cNvPr>
+          <p:cNvSpPr txBox="1"/>
+          <p:nvPr/>
+        </p:nvSpPr>
+        <p:spPr>
+          <a:xfrm>
+            <a:off x="4836681" y="4064000"/>
+            <a:ext cx="2518638" cy="369332"/>
+          </a:xfrm>
+          <a:prstGeom prst="rect">
+            <a:avLst/>
+          </a:prstGeom>
+          <a:noFill/>
+        </p:spPr>
+        <p:txBody>
+          <a:bodyPr wrap="none" rtlCol="0">
+            <a:spAutoFit/>
+          </a:bodyPr>
+          <a:lstStyle/>
+          <a:p>
+            <a:r>
+              <a:rPr kumimoji="1" lang="ja-JP" altLang="en-US"/>
+              <a:t>図</a:t>
+            </a:r>
+            <a:r>
+              <a:rPr lang="en-US" altLang="ja-JP" dirty="0"/>
+              <a:t>2</a:t>
+            </a:r>
+            <a:r>
+              <a:rPr kumimoji="1" lang="ja-JP" altLang="en-US"/>
+              <a:t>　</a:t>
+            </a:r>
+            <a:r>
+              <a:rPr lang="en-US" altLang="ja-JP" dirty="0"/>
+              <a:t>2</a:t>
+            </a:r>
+            <a:r>
+              <a:rPr kumimoji="1" lang="ja-JP" altLang="en-US"/>
+              <a:t>問目の実行結果</a:t>
+            </a:r>
+          </a:p>
+        </p:txBody>
+      </p:sp>
     </p:spTree>
     <p:extLst>
       <p:ext uri="{BB962C8B-B14F-4D97-AF65-F5344CB8AC3E}">
@@ -3673,6 +3840,57 @@
           <a:chExt cx="0" cy="0"/>
         </a:xfrm>
       </p:grpSpPr>
+      <p:sp>
+        <p:nvSpPr>
+          <p:cNvPr id="2" name="テキスト ボックス 1">
+            <a:extLst>
+              <a:ext uri="{FF2B5EF4-FFF2-40B4-BE49-F238E27FC236}">
+                <a16:creationId xmlns:a16="http://schemas.microsoft.com/office/drawing/2014/main" id="{4D2DA496-283D-4868-E114-791DED390D4B}"/>
+              </a:ext>
+            </a:extLst>
+          </p:cNvPr>
+          <p:cNvSpPr txBox="1"/>
+          <p:nvPr/>
+        </p:nvSpPr>
+        <p:spPr>
+          <a:xfrm>
+            <a:off x="4836681" y="4064000"/>
+            <a:ext cx="2518638" cy="369332"/>
+          </a:xfrm>
+          <a:prstGeom prst="rect">
+            <a:avLst/>
+          </a:prstGeom>
+          <a:noFill/>
+        </p:spPr>
+        <p:txBody>
+          <a:bodyPr wrap="none" rtlCol="0">
+            <a:spAutoFit/>
+          </a:bodyPr>
+          <a:lstStyle/>
+          <a:p>
+            <a:r>
+              <a:rPr kumimoji="1" lang="ja-JP" altLang="en-US"/>
+              <a:t>図</a:t>
+            </a:r>
+            <a:r>
+              <a:rPr kumimoji="1" lang="en-US" altLang="ja-JP" dirty="0"/>
+              <a:t>3</a:t>
+            </a:r>
+            <a:r>
+              <a:rPr kumimoji="1" lang="ja-JP" altLang="en-US"/>
+              <a:t>　</a:t>
+            </a:r>
+            <a:r>
+              <a:rPr kumimoji="1" lang="en-US" altLang="ja-JP" dirty="0"/>
+              <a:t>3</a:t>
+            </a:r>
+            <a:r>
+              <a:rPr kumimoji="1" lang="ja-JP" altLang="en-US"/>
+              <a:t>問目の実行結果</a:t>
+            </a:r>
+          </a:p>
+        </p:txBody>
+      </p:sp>
     </p:spTree>
     <p:extLst>
       <p:ext uri="{BB962C8B-B14F-4D97-AF65-F5344CB8AC3E}">
@@ -3703,6 +3921,57 @@
           <a:chExt cx="0" cy="0"/>
         </a:xfrm>
       </p:grpSpPr>
+      <p:sp>
+        <p:nvSpPr>
+          <p:cNvPr id="2" name="テキスト ボックス 1">
+            <a:extLst>
+              <a:ext uri="{FF2B5EF4-FFF2-40B4-BE49-F238E27FC236}">
+                <a16:creationId xmlns:a16="http://schemas.microsoft.com/office/drawing/2014/main" id="{A526EC2C-3094-FA77-DAC4-0B0941983733}"/>
+              </a:ext>
+            </a:extLst>
+          </p:cNvPr>
+          <p:cNvSpPr txBox="1"/>
+          <p:nvPr/>
+        </p:nvSpPr>
+        <p:spPr>
+          <a:xfrm>
+            <a:off x="4836681" y="4064000"/>
+            <a:ext cx="2518638" cy="369332"/>
+          </a:xfrm>
+          <a:prstGeom prst="rect">
+            <a:avLst/>
+          </a:prstGeom>
+          <a:noFill/>
+        </p:spPr>
+        <p:txBody>
+          <a:bodyPr wrap="none" rtlCol="0">
+            <a:spAutoFit/>
+          </a:bodyPr>
+          <a:lstStyle/>
+          <a:p>
+            <a:r>
+              <a:rPr kumimoji="1" lang="ja-JP" altLang="en-US"/>
+              <a:t>図</a:t>
+            </a:r>
+            <a:r>
+              <a:rPr kumimoji="1" lang="en-US" altLang="ja-JP" dirty="0"/>
+              <a:t>4</a:t>
+            </a:r>
+            <a:r>
+              <a:rPr kumimoji="1" lang="ja-JP" altLang="en-US"/>
+              <a:t>　</a:t>
+            </a:r>
+            <a:r>
+              <a:rPr kumimoji="1" lang="en-US" altLang="ja-JP" dirty="0"/>
+              <a:t>4</a:t>
+            </a:r>
+            <a:r>
+              <a:rPr kumimoji="1" lang="ja-JP" altLang="en-US"/>
+              <a:t>問目の実行結果</a:t>
+            </a:r>
+          </a:p>
+        </p:txBody>
+      </p:sp>
     </p:spTree>
     <p:extLst>
       <p:ext uri="{BB962C8B-B14F-4D97-AF65-F5344CB8AC3E}">
@@ -3733,6 +4002,87 @@
           <a:chExt cx="0" cy="0"/>
         </a:xfrm>
       </p:grpSpPr>
+      <p:pic>
+        <p:nvPicPr>
+          <p:cNvPr id="3" name="図 2">
+            <a:extLst>
+              <a:ext uri="{FF2B5EF4-FFF2-40B4-BE49-F238E27FC236}">
+                <a16:creationId xmlns:a16="http://schemas.microsoft.com/office/drawing/2014/main" id="{5FB6A685-902D-ADAB-6EF6-72B6E6623F49}"/>
+              </a:ext>
+            </a:extLst>
+          </p:cNvPr>
+          <p:cNvPicPr>
+            <a:picLocks noChangeAspect="1"/>
+          </p:cNvPicPr>
+          <p:nvPr/>
+        </p:nvPicPr>
+        <p:blipFill>
+          <a:blip r:embed="rId2"/>
+          <a:stretch>
+            <a:fillRect/>
+          </a:stretch>
+        </p:blipFill>
+        <p:spPr>
+          <a:xfrm>
+            <a:off x="3803650" y="2863850"/>
+            <a:ext cx="4584700" cy="1130300"/>
+          </a:xfrm>
+          <a:prstGeom prst="rect">
+            <a:avLst/>
+          </a:prstGeom>
+        </p:spPr>
+      </p:pic>
+      <p:sp>
+        <p:nvSpPr>
+          <p:cNvPr id="4" name="テキスト ボックス 3">
+            <a:extLst>
+              <a:ext uri="{FF2B5EF4-FFF2-40B4-BE49-F238E27FC236}">
+                <a16:creationId xmlns:a16="http://schemas.microsoft.com/office/drawing/2014/main" id="{8030F3DE-5072-0995-4541-03AE96AB7004}"/>
+              </a:ext>
+            </a:extLst>
+          </p:cNvPr>
+          <p:cNvSpPr txBox="1"/>
+          <p:nvPr/>
+        </p:nvSpPr>
+        <p:spPr>
+          <a:xfrm>
+            <a:off x="4836681" y="3994150"/>
+            <a:ext cx="2518638" cy="369332"/>
+          </a:xfrm>
+          <a:prstGeom prst="rect">
+            <a:avLst/>
+          </a:prstGeom>
+          <a:noFill/>
+        </p:spPr>
+        <p:txBody>
+          <a:bodyPr wrap="none" rtlCol="0">
+            <a:spAutoFit/>
+          </a:bodyPr>
+          <a:lstStyle/>
+          <a:p>
+            <a:r>
+              <a:rPr kumimoji="1" lang="ja-JP" altLang="en-US"/>
+              <a:t>図</a:t>
+            </a:r>
+            <a:r>
+              <a:rPr lang="en-US" altLang="ja-JP" dirty="0"/>
+              <a:t>5</a:t>
+            </a:r>
+            <a:r>
+              <a:rPr kumimoji="1" lang="ja-JP" altLang="en-US"/>
+              <a:t>　</a:t>
+            </a:r>
+            <a:r>
+              <a:rPr lang="en-US" altLang="ja-JP" dirty="0"/>
+              <a:t>5</a:t>
+            </a:r>
+            <a:r>
+              <a:rPr kumimoji="1" lang="ja-JP" altLang="en-US"/>
+              <a:t>問目の実行結果</a:t>
+            </a:r>
+          </a:p>
+        </p:txBody>
+      </p:sp>
     </p:spTree>
     <p:extLst>
       <p:ext uri="{BB962C8B-B14F-4D97-AF65-F5344CB8AC3E}">

--- a/latex/lec4/report_2412747_4.pptx
+++ b/latex/lec4/report_2412747_4.pptx
@@ -3854,7 +3854,7 @@
         </p:nvSpPr>
         <p:spPr>
           <a:xfrm>
-            <a:off x="4836681" y="4064000"/>
+            <a:off x="4836681" y="4492171"/>
             <a:ext cx="2518638" cy="369332"/>
           </a:xfrm>
           <a:prstGeom prst="rect">
@@ -3891,6 +3891,36 @@
           </a:p>
         </p:txBody>
       </p:sp>
+      <p:pic>
+        <p:nvPicPr>
+          <p:cNvPr id="4" name="図 3">
+            <a:extLst>
+              <a:ext uri="{FF2B5EF4-FFF2-40B4-BE49-F238E27FC236}">
+                <a16:creationId xmlns:a16="http://schemas.microsoft.com/office/drawing/2014/main" id="{ED8A50CB-118E-6330-C74C-64FE05B7523D}"/>
+              </a:ext>
+            </a:extLst>
+          </p:cNvPr>
+          <p:cNvPicPr>
+            <a:picLocks noChangeAspect="1"/>
+          </p:cNvPicPr>
+          <p:nvPr/>
+        </p:nvPicPr>
+        <p:blipFill>
+          <a:blip r:embed="rId2"/>
+          <a:stretch>
+            <a:fillRect/>
+          </a:stretch>
+        </p:blipFill>
+        <p:spPr>
+          <a:xfrm>
+            <a:off x="4254500" y="2413000"/>
+            <a:ext cx="3683000" cy="2032000"/>
+          </a:xfrm>
+          <a:prstGeom prst="rect">
+            <a:avLst/>
+          </a:prstGeom>
+        </p:spPr>
+      </p:pic>
     </p:spTree>
     <p:extLst>
       <p:ext uri="{BB962C8B-B14F-4D97-AF65-F5344CB8AC3E}">
@@ -3935,7 +3965,7 @@
         </p:nvSpPr>
         <p:spPr>
           <a:xfrm>
-            <a:off x="4836681" y="4064000"/>
+            <a:off x="4836681" y="5959928"/>
             <a:ext cx="2518638" cy="369332"/>
           </a:xfrm>
           <a:prstGeom prst="rect">
@@ -3972,6 +4002,36 @@
           </a:p>
         </p:txBody>
       </p:sp>
+      <p:pic>
+        <p:nvPicPr>
+          <p:cNvPr id="4" name="図 3">
+            <a:extLst>
+              <a:ext uri="{FF2B5EF4-FFF2-40B4-BE49-F238E27FC236}">
+                <a16:creationId xmlns:a16="http://schemas.microsoft.com/office/drawing/2014/main" id="{F1445AF3-0E9D-5D55-32ED-15D2706B0677}"/>
+              </a:ext>
+            </a:extLst>
+          </p:cNvPr>
+          <p:cNvPicPr>
+            <a:picLocks noChangeAspect="1"/>
+          </p:cNvPicPr>
+          <p:nvPr/>
+        </p:nvPicPr>
+        <p:blipFill>
+          <a:blip r:embed="rId2"/>
+          <a:stretch>
+            <a:fillRect/>
+          </a:stretch>
+        </p:blipFill>
+        <p:spPr>
+          <a:xfrm>
+            <a:off x="3740150" y="927100"/>
+            <a:ext cx="4711700" cy="5003800"/>
+          </a:xfrm>
+          <a:prstGeom prst="rect">
+            <a:avLst/>
+          </a:prstGeom>
+        </p:spPr>
+      </p:pic>
     </p:spTree>
     <p:extLst>
       <p:ext uri="{BB962C8B-B14F-4D97-AF65-F5344CB8AC3E}">
